--- a/1С_Предприятие/практика 9.pptx
+++ b/1С_Предприятие/практика 9.pptx
@@ -294,7 +294,7 @@
             <a:fld id="{E1AAB751-8214-4DCA-A67E-1243E59E7911}" type="datetimeFigureOut">
               <a:rPr lang="ru-RU" smtClean="0"/>
               <a:pPr/>
-              <a:t>30.04.2026</a:t>
+              <a:t>12.05.2026</a:t>
             </a:fld>
             <a:endParaRPr lang="ru-RU"/>
           </a:p>
@@ -461,7 +461,7 @@
             <a:fld id="{E1AAB751-8214-4DCA-A67E-1243E59E7911}" type="datetimeFigureOut">
               <a:rPr lang="ru-RU" smtClean="0"/>
               <a:pPr/>
-              <a:t>30.04.2026</a:t>
+              <a:t>12.05.2026</a:t>
             </a:fld>
             <a:endParaRPr lang="ru-RU"/>
           </a:p>
@@ -638,7 +638,7 @@
             <a:fld id="{E1AAB751-8214-4DCA-A67E-1243E59E7911}" type="datetimeFigureOut">
               <a:rPr lang="ru-RU" smtClean="0"/>
               <a:pPr/>
-              <a:t>30.04.2026</a:t>
+              <a:t>12.05.2026</a:t>
             </a:fld>
             <a:endParaRPr lang="ru-RU"/>
           </a:p>
@@ -805,7 +805,7 @@
             <a:fld id="{E1AAB751-8214-4DCA-A67E-1243E59E7911}" type="datetimeFigureOut">
               <a:rPr lang="ru-RU" smtClean="0"/>
               <a:pPr/>
-              <a:t>30.04.2026</a:t>
+              <a:t>12.05.2026</a:t>
             </a:fld>
             <a:endParaRPr lang="ru-RU"/>
           </a:p>
@@ -1048,7 +1048,7 @@
             <a:fld id="{E1AAB751-8214-4DCA-A67E-1243E59E7911}" type="datetimeFigureOut">
               <a:rPr lang="ru-RU" smtClean="0"/>
               <a:pPr/>
-              <a:t>30.04.2026</a:t>
+              <a:t>12.05.2026</a:t>
             </a:fld>
             <a:endParaRPr lang="ru-RU"/>
           </a:p>
@@ -1333,7 +1333,7 @@
             <a:fld id="{E1AAB751-8214-4DCA-A67E-1243E59E7911}" type="datetimeFigureOut">
               <a:rPr lang="ru-RU" smtClean="0"/>
               <a:pPr/>
-              <a:t>30.04.2026</a:t>
+              <a:t>12.05.2026</a:t>
             </a:fld>
             <a:endParaRPr lang="ru-RU"/>
           </a:p>
@@ -1752,7 +1752,7 @@
             <a:fld id="{E1AAB751-8214-4DCA-A67E-1243E59E7911}" type="datetimeFigureOut">
               <a:rPr lang="ru-RU" smtClean="0"/>
               <a:pPr/>
-              <a:t>30.04.2026</a:t>
+              <a:t>12.05.2026</a:t>
             </a:fld>
             <a:endParaRPr lang="ru-RU"/>
           </a:p>
@@ -1867,7 +1867,7 @@
             <a:fld id="{E1AAB751-8214-4DCA-A67E-1243E59E7911}" type="datetimeFigureOut">
               <a:rPr lang="ru-RU" smtClean="0"/>
               <a:pPr/>
-              <a:t>30.04.2026</a:t>
+              <a:t>12.05.2026</a:t>
             </a:fld>
             <a:endParaRPr lang="ru-RU"/>
           </a:p>
@@ -1959,7 +1959,7 @@
             <a:fld id="{E1AAB751-8214-4DCA-A67E-1243E59E7911}" type="datetimeFigureOut">
               <a:rPr lang="ru-RU" smtClean="0"/>
               <a:pPr/>
-              <a:t>30.04.2026</a:t>
+              <a:t>12.05.2026</a:t>
             </a:fld>
             <a:endParaRPr lang="ru-RU"/>
           </a:p>
@@ -2233,7 +2233,7 @@
             <a:fld id="{E1AAB751-8214-4DCA-A67E-1243E59E7911}" type="datetimeFigureOut">
               <a:rPr lang="ru-RU" smtClean="0"/>
               <a:pPr/>
-              <a:t>30.04.2026</a:t>
+              <a:t>12.05.2026</a:t>
             </a:fld>
             <a:endParaRPr lang="ru-RU"/>
           </a:p>
@@ -2483,7 +2483,7 @@
             <a:fld id="{E1AAB751-8214-4DCA-A67E-1243E59E7911}" type="datetimeFigureOut">
               <a:rPr lang="ru-RU" smtClean="0"/>
               <a:pPr/>
-              <a:t>30.04.2026</a:t>
+              <a:t>12.05.2026</a:t>
             </a:fld>
             <a:endParaRPr lang="ru-RU"/>
           </a:p>
@@ -2693,7 +2693,7 @@
             <a:fld id="{E1AAB751-8214-4DCA-A67E-1243E59E7911}" type="datetimeFigureOut">
               <a:rPr lang="ru-RU" smtClean="0"/>
               <a:pPr/>
-              <a:t>30.04.2026</a:t>
+              <a:t>12.05.2026</a:t>
             </a:fld>
             <a:endParaRPr lang="ru-RU"/>
           </a:p>
@@ -3225,6 +3225,16 @@
           </a:p>
           <a:p>
             <a:pPr algn="just"/>
+            <a:endParaRPr lang="en-US" sz="2400" b="1" dirty="0" smtClean="0">
+              <a:solidFill>
+                <a:srgbClr val="FF0000"/>
+              </a:solidFill>
+              <a:latin typeface="Times New Roman" pitchFamily="18" charset="0"/>
+              <a:cs typeface="Times New Roman" pitchFamily="18" charset="0"/>
+            </a:endParaRPr>
+          </a:p>
+          <a:p>
+            <a:pPr algn="just"/>
             <a:r>
               <a:rPr lang="ru-RU" sz="2400" b="1" dirty="0" smtClean="0">
                 <a:solidFill>
@@ -3265,9 +3275,6 @@
               </a:rPr>
               <a:t>CSS</a:t>
             </a:r>
-          </a:p>
-          <a:p>
-            <a:pPr algn="just"/>
             <a:endParaRPr lang="en-US" sz="2400" dirty="0" smtClean="0">
               <a:latin typeface="Times New Roman" pitchFamily="18" charset="0"/>
               <a:cs typeface="Times New Roman" pitchFamily="18" charset="0"/>
@@ -3281,15 +3288,7 @@
                 <a:cs typeface="Times New Roman" pitchFamily="18" charset="0"/>
                 <a:hlinkClick r:id="rId4"/>
               </a:rPr>
-              <a:t>https</a:t>
-            </a:r>
-            <a:r>
-              <a:rPr lang="en-US" sz="2400" dirty="0" smtClean="0">
-                <a:latin typeface="Times New Roman" pitchFamily="18" charset="0"/>
-                <a:cs typeface="Times New Roman" pitchFamily="18" charset="0"/>
-                <a:hlinkClick r:id="rId4"/>
-              </a:rPr>
-              <a:t>://mbdatateach.github.io/site/%D0%94%D0%9F%D0%9E/%D0%9B%D0%B5%D0%BA%D1%86%D0%B8%D1%8F.pptx</a:t>
+              <a:t>https://mbdatateach.github.io/site/%D0%94%D0%9F%D0%9E/%D0%9B%D0%B5%D0%BA%D1%86%D0%B8%D1%8F.pptx</a:t>
             </a:r>
             <a:endParaRPr lang="ru-RU" sz="2400" dirty="0" smtClean="0">
               <a:latin typeface="Times New Roman" pitchFamily="18" charset="0"/>
